--- a/output/slides/Unit10_Energy_Sources/U10L6_Skills_2.pptx
+++ b/output/slides/Unit10_Energy_Sources/U10L6_Skills_2.pptx
@@ -3334,7 +3334,7 @@
                 </a:solidFill>
                 <a:latin typeface="Calibri"/>
               </a:rPr>
-              <a:t>UNIT 10  ·  LESSON 6  ·  PERIOD 75</a:t>
+              <a:t>UNIT 10  ·  LESSON 6  ·  PERIOD 77</a:t>
             </a:r>
           </a:p>
         </p:txBody>

--- a/output/slides/Unit10_Energy_Sources/U10L6_Skills_2.pptx
+++ b/output/slides/Unit10_Energy_Sources/U10L6_Skills_2.pptx
@@ -5403,14 +5403,242 @@
       </p:sp>
       <p:sp>
         <p:nvSpPr>
-          <p:cNvPr id="11" name="TextBox 10"/>
-          <p:cNvSpPr txBox="1"/>
-          <p:nvPr/>
-        </p:nvSpPr>
-        <p:spPr>
-          <a:xfrm>
-            <a:off x="731520" y="5577840"/>
-            <a:ext cx="10698480" cy="822960"/>
+          <p:cNvPr id="11" name="Rounded Rectangle 10"/>
+          <p:cNvSpPr/>
+          <p:nvPr/>
+        </p:nvSpPr>
+        <p:spPr>
+          <a:xfrm>
+            <a:off x="731520" y="5029200"/>
+            <a:ext cx="3493008" cy="502920"/>
+          </a:xfrm>
+          <a:prstGeom prst="roundRect">
+            <a:avLst>
+              <a:gd name="adj" fmla="val 6000"/>
+            </a:avLst>
+          </a:prstGeom>
+          <a:solidFill>
+            <a:srgbClr val="E7F1FA"/>
+          </a:solidFill>
+          <a:ln w="19050">
+            <a:solidFill>
+              <a:srgbClr val="1E6FB8"/>
+            </a:solidFill>
+          </a:ln>
+          <a:effectLst/>
+        </p:spPr>
+        <p:style>
+          <a:lnRef idx="1">
+            <a:schemeClr val="accent1"/>
+          </a:lnRef>
+          <a:fillRef idx="3">
+            <a:schemeClr val="accent1"/>
+          </a:fillRef>
+          <a:effectRef idx="2">
+            <a:schemeClr val="accent1"/>
+          </a:effectRef>
+          <a:fontRef idx="minor">
+            <a:schemeClr val="lt1"/>
+          </a:fontRef>
+        </p:style>
+        <p:txBody>
+          <a:bodyPr rtlCol="0" anchor="ctr" wrap="square" lIns="54864" rIns="54864"/>
+          <a:lstStyle/>
+          <a:p>
+            <a:pPr algn="ctr"/>
+            <a:r>
+              <a:rPr sz="1300" b="1">
+                <a:solidFill>
+                  <a:srgbClr val="142C4F"/>
+                </a:solidFill>
+                <a:hlinkClick r:id="rId2"/>
+              </a:rPr>
+              <a:t>▶ U10L6 part 1</a:t>
+            </a:r>
+          </a:p>
+        </p:txBody>
+      </p:sp>
+      <p:sp>
+        <p:nvSpPr>
+          <p:cNvPr id="12" name="Rounded Rectangle 11"/>
+          <p:cNvSpPr/>
+          <p:nvPr/>
+        </p:nvSpPr>
+        <p:spPr>
+          <a:xfrm>
+            <a:off x="4334256" y="5029200"/>
+            <a:ext cx="3493008" cy="502920"/>
+          </a:xfrm>
+          <a:prstGeom prst="roundRect">
+            <a:avLst>
+              <a:gd name="adj" fmla="val 6000"/>
+            </a:avLst>
+          </a:prstGeom>
+          <a:solidFill>
+            <a:srgbClr val="E7F1FA"/>
+          </a:solidFill>
+          <a:ln w="19050">
+            <a:solidFill>
+              <a:srgbClr val="1E6FB8"/>
+            </a:solidFill>
+          </a:ln>
+          <a:effectLst/>
+        </p:spPr>
+        <p:style>
+          <a:lnRef idx="1">
+            <a:schemeClr val="accent1"/>
+          </a:lnRef>
+          <a:fillRef idx="3">
+            <a:schemeClr val="accent1"/>
+          </a:fillRef>
+          <a:effectRef idx="2">
+            <a:schemeClr val="accent1"/>
+          </a:effectRef>
+          <a:fontRef idx="minor">
+            <a:schemeClr val="lt1"/>
+          </a:fontRef>
+        </p:style>
+        <p:txBody>
+          <a:bodyPr rtlCol="0" anchor="ctr" wrap="square" lIns="54864" rIns="54864"/>
+          <a:lstStyle/>
+          <a:p>
+            <a:pPr algn="ctr"/>
+            <a:r>
+              <a:rPr sz="1300" b="1">
+                <a:solidFill>
+                  <a:srgbClr val="142C4F"/>
+                </a:solidFill>
+                <a:hlinkClick r:id="rId3"/>
+              </a:rPr>
+              <a:t>▶ U10L6 part 2</a:t>
+            </a:r>
+          </a:p>
+        </p:txBody>
+      </p:sp>
+      <p:sp>
+        <p:nvSpPr>
+          <p:cNvPr id="13" name="Rounded Rectangle 12"/>
+          <p:cNvSpPr/>
+          <p:nvPr/>
+        </p:nvSpPr>
+        <p:spPr>
+          <a:xfrm>
+            <a:off x="7936992" y="5029200"/>
+            <a:ext cx="3493008" cy="502920"/>
+          </a:xfrm>
+          <a:prstGeom prst="roundRect">
+            <a:avLst>
+              <a:gd name="adj" fmla="val 6000"/>
+            </a:avLst>
+          </a:prstGeom>
+          <a:solidFill>
+            <a:srgbClr val="E7F1FA"/>
+          </a:solidFill>
+          <a:ln w="19050">
+            <a:solidFill>
+              <a:srgbClr val="1E6FB8"/>
+            </a:solidFill>
+          </a:ln>
+          <a:effectLst/>
+        </p:spPr>
+        <p:style>
+          <a:lnRef idx="1">
+            <a:schemeClr val="accent1"/>
+          </a:lnRef>
+          <a:fillRef idx="3">
+            <a:schemeClr val="accent1"/>
+          </a:fillRef>
+          <a:effectRef idx="2">
+            <a:schemeClr val="accent1"/>
+          </a:effectRef>
+          <a:fontRef idx="minor">
+            <a:schemeClr val="lt1"/>
+          </a:fontRef>
+        </p:style>
+        <p:txBody>
+          <a:bodyPr rtlCol="0" anchor="ctr" wrap="square" lIns="54864" rIns="54864"/>
+          <a:lstStyle/>
+          <a:p>
+            <a:pPr algn="ctr"/>
+            <a:r>
+              <a:rPr sz="1300" b="1">
+                <a:solidFill>
+                  <a:srgbClr val="142C4F"/>
+                </a:solidFill>
+                <a:hlinkClick r:id="rId4"/>
+              </a:rPr>
+              <a:t>▶ U10L6 part 3</a:t>
+            </a:r>
+          </a:p>
+        </p:txBody>
+      </p:sp>
+      <p:sp>
+        <p:nvSpPr>
+          <p:cNvPr id="14" name="Rounded Rectangle 13"/>
+          <p:cNvSpPr/>
+          <p:nvPr/>
+        </p:nvSpPr>
+        <p:spPr>
+          <a:xfrm>
+            <a:off x="731520" y="5586984"/>
+            <a:ext cx="3493008" cy="502920"/>
+          </a:xfrm>
+          <a:prstGeom prst="roundRect">
+            <a:avLst>
+              <a:gd name="adj" fmla="val 6000"/>
+            </a:avLst>
+          </a:prstGeom>
+          <a:solidFill>
+            <a:srgbClr val="E7F1FA"/>
+          </a:solidFill>
+          <a:ln w="19050">
+            <a:solidFill>
+              <a:srgbClr val="1E6FB8"/>
+            </a:solidFill>
+          </a:ln>
+          <a:effectLst/>
+        </p:spPr>
+        <p:style>
+          <a:lnRef idx="1">
+            <a:schemeClr val="accent1"/>
+          </a:lnRef>
+          <a:fillRef idx="3">
+            <a:schemeClr val="accent1"/>
+          </a:fillRef>
+          <a:effectRef idx="2">
+            <a:schemeClr val="accent1"/>
+          </a:effectRef>
+          <a:fontRef idx="minor">
+            <a:schemeClr val="lt1"/>
+          </a:fontRef>
+        </p:style>
+        <p:txBody>
+          <a:bodyPr rtlCol="0" anchor="ctr" wrap="square" lIns="54864" rIns="54864"/>
+          <a:lstStyle/>
+          <a:p>
+            <a:pPr algn="ctr"/>
+            <a:r>
+              <a:rPr sz="1300" b="1">
+                <a:solidFill>
+                  <a:srgbClr val="142C4F"/>
+                </a:solidFill>
+                <a:hlinkClick r:id="rId5"/>
+              </a:rPr>
+              <a:t>▶ U10L6 part 4</a:t>
+            </a:r>
+          </a:p>
+        </p:txBody>
+      </p:sp>
+      <p:sp>
+        <p:nvSpPr>
+          <p:cNvPr id="15" name="TextBox 14"/>
+          <p:cNvSpPr txBox="1"/>
+          <p:nvPr/>
+        </p:nvSpPr>
+        <p:spPr>
+          <a:xfrm>
+            <a:off x="731520" y="6181344"/>
+            <a:ext cx="10698480" cy="502920"/>
           </a:xfrm>
           <a:prstGeom prst="rect">
             <a:avLst/>
@@ -5432,7 +5660,7 @@
               </a:spcAft>
             </a:pPr>
             <a:r>
-              <a:rPr sz="1200" b="0" i="0">
+              <a:rPr sz="1100" b="0" i="0">
                 <a:solidFill>
                   <a:srgbClr val="6B7280"/>
                 </a:solidFill>

--- a/output/slides/Unit10_Energy_Sources/U10L6_Skills_2.pptx
+++ b/output/slides/Unit10_Energy_Sources/U10L6_Skills_2.pptx
@@ -5329,8 +5329,8 @@
         </p:nvSpPr>
         <p:spPr>
           <a:xfrm>
-            <a:off x="731520" y="4023360"/>
-            <a:ext cx="10698480" cy="1463040"/>
+            <a:off x="731520" y="3703320"/>
+            <a:ext cx="10698480" cy="969264"/>
           </a:xfrm>
           <a:prstGeom prst="rect">
             <a:avLst/>
@@ -5352,7 +5352,7 @@
               </a:spcAft>
             </a:pPr>
             <a:r>
-              <a:rPr sz="2000" b="0" i="0">
+              <a:rPr sz="1600" b="0" i="0">
                 <a:solidFill>
                   <a:srgbClr val="142C4F"/>
                 </a:solidFill>
@@ -5371,7 +5371,7 @@
               </a:spcAft>
             </a:pPr>
             <a:r>
-              <a:rPr sz="2000" b="0" i="0">
+              <a:rPr sz="1600" b="0" i="0">
                 <a:solidFill>
                   <a:srgbClr val="142C4F"/>
                 </a:solidFill>
@@ -5390,7 +5390,7 @@
               </a:spcAft>
             </a:pPr>
             <a:r>
-              <a:rPr sz="2000" b="0" i="0">
+              <a:rPr sz="1600" b="0" i="0">
                 <a:solidFill>
                   <a:srgbClr val="142C4F"/>
                 </a:solidFill>
@@ -5409,8 +5409,8 @@
         </p:nvSpPr>
         <p:spPr>
           <a:xfrm>
-            <a:off x="731520" y="5029200"/>
-            <a:ext cx="3493008" cy="502920"/>
+            <a:off x="731520" y="4782312"/>
+            <a:ext cx="3493008" cy="475488"/>
           </a:xfrm>
           <a:prstGeom prst="roundRect">
             <a:avLst>
@@ -5442,7 +5442,7 @@
           </a:fontRef>
         </p:style>
         <p:txBody>
-          <a:bodyPr rtlCol="0" anchor="ctr" wrap="square" lIns="54864" rIns="54864"/>
+          <a:bodyPr rtlCol="0" anchor="ctr" wrap="square" lIns="45720" rIns="45720" tIns="0" bIns="0"/>
           <a:lstStyle/>
           <a:p>
             <a:pPr algn="ctr"/>
@@ -5466,8 +5466,8 @@
         </p:nvSpPr>
         <p:spPr>
           <a:xfrm>
-            <a:off x="4334256" y="5029200"/>
-            <a:ext cx="3493008" cy="502920"/>
+            <a:off x="4334256" y="4782312"/>
+            <a:ext cx="3493008" cy="475488"/>
           </a:xfrm>
           <a:prstGeom prst="roundRect">
             <a:avLst>
@@ -5499,7 +5499,7 @@
           </a:fontRef>
         </p:style>
         <p:txBody>
-          <a:bodyPr rtlCol="0" anchor="ctr" wrap="square" lIns="54864" rIns="54864"/>
+          <a:bodyPr rtlCol="0" anchor="ctr" wrap="square" lIns="45720" rIns="45720" tIns="0" bIns="0"/>
           <a:lstStyle/>
           <a:p>
             <a:pPr algn="ctr"/>
@@ -5523,8 +5523,8 @@
         </p:nvSpPr>
         <p:spPr>
           <a:xfrm>
-            <a:off x="7936992" y="5029200"/>
-            <a:ext cx="3493008" cy="502920"/>
+            <a:off x="7936992" y="4782312"/>
+            <a:ext cx="3493008" cy="475488"/>
           </a:xfrm>
           <a:prstGeom prst="roundRect">
             <a:avLst>
@@ -5556,7 +5556,7 @@
           </a:fontRef>
         </p:style>
         <p:txBody>
-          <a:bodyPr rtlCol="0" anchor="ctr" wrap="square" lIns="54864" rIns="54864"/>
+          <a:bodyPr rtlCol="0" anchor="ctr" wrap="square" lIns="45720" rIns="45720" tIns="0" bIns="0"/>
           <a:lstStyle/>
           <a:p>
             <a:pPr algn="ctr"/>
@@ -5580,8 +5580,8 @@
         </p:nvSpPr>
         <p:spPr>
           <a:xfrm>
-            <a:off x="731520" y="5586984"/>
-            <a:ext cx="3493008" cy="502920"/>
+            <a:off x="731520" y="5321808"/>
+            <a:ext cx="10698480" cy="475488"/>
           </a:xfrm>
           <a:prstGeom prst="roundRect">
             <a:avLst>
@@ -5613,32 +5613,89 @@
           </a:fontRef>
         </p:style>
         <p:txBody>
-          <a:bodyPr rtlCol="0" anchor="ctr" wrap="square" lIns="54864" rIns="54864"/>
+          <a:bodyPr rtlCol="0" anchor="ctr" wrap="square" lIns="45720" rIns="45720" tIns="0" bIns="0"/>
           <a:lstStyle/>
           <a:p>
             <a:pPr algn="ctr"/>
             <a:r>
-              <a:rPr sz="1300" b="1">
+              <a:rPr sz="1500" b="1">
                 <a:solidFill>
                   <a:srgbClr val="142C4F"/>
                 </a:solidFill>
                 <a:hlinkClick r:id="rId5"/>
               </a:rPr>
-              <a:t>▶ U10L6 part 4</a:t>
-            </a:r>
-          </a:p>
-        </p:txBody>
-      </p:sp>
-      <p:sp>
-        <p:nvSpPr>
-          <p:cNvPr id="15" name="TextBox 14"/>
-          <p:cNvSpPr txBox="1"/>
-          <p:nvPr/>
-        </p:nvSpPr>
-        <p:spPr>
-          <a:xfrm>
-            <a:off x="731520" y="6181344"/>
-            <a:ext cx="10698480" cy="502920"/>
+              <a:t>▶ Play audio</a:t>
+            </a:r>
+          </a:p>
+        </p:txBody>
+      </p:sp>
+      <p:sp>
+        <p:nvSpPr>
+          <p:cNvPr id="15" name="Rounded Rectangle 14"/>
+          <p:cNvSpPr/>
+          <p:nvPr/>
+        </p:nvSpPr>
+        <p:spPr>
+          <a:xfrm>
+            <a:off x="731520" y="5861304"/>
+            <a:ext cx="10698480" cy="475488"/>
+          </a:xfrm>
+          <a:prstGeom prst="roundRect">
+            <a:avLst>
+              <a:gd name="adj" fmla="val 6000"/>
+            </a:avLst>
+          </a:prstGeom>
+          <a:solidFill>
+            <a:srgbClr val="E3F3EE"/>
+          </a:solidFill>
+          <a:ln w="19050">
+            <a:solidFill>
+              <a:srgbClr val="0E7C66"/>
+            </a:solidFill>
+          </a:ln>
+          <a:effectLst/>
+        </p:spPr>
+        <p:style>
+          <a:lnRef idx="1">
+            <a:schemeClr val="accent1"/>
+          </a:lnRef>
+          <a:fillRef idx="3">
+            <a:schemeClr val="accent1"/>
+          </a:fillRef>
+          <a:effectRef idx="2">
+            <a:schemeClr val="accent1"/>
+          </a:effectRef>
+          <a:fontRef idx="minor">
+            <a:schemeClr val="lt1"/>
+          </a:fontRef>
+        </p:style>
+        <p:txBody>
+          <a:bodyPr rtlCol="0" anchor="ctr" wrap="square" lIns="45720" rIns="45720" tIns="0" bIns="0"/>
+          <a:lstStyle/>
+          <a:p>
+            <a:pPr algn="ctr"/>
+            <a:r>
+              <a:rPr sz="1400" b="1">
+                <a:solidFill>
+                  <a:srgbClr val="0E7C66"/>
+                </a:solidFill>
+                <a:hlinkClick r:id="rId6"/>
+              </a:rPr>
+              <a:t>🌐 Listen online</a:t>
+            </a:r>
+          </a:p>
+        </p:txBody>
+      </p:sp>
+      <p:sp>
+        <p:nvSpPr>
+          <p:cNvPr id="16" name="TextBox 15"/>
+          <p:cNvSpPr txBox="1"/>
+          <p:nvPr/>
+        </p:nvSpPr>
+        <p:spPr>
+          <a:xfrm>
+            <a:off x="731520" y="6428232"/>
+            <a:ext cx="10698480" cy="384048"/>
           </a:xfrm>
           <a:prstGeom prst="rect">
             <a:avLst/>
@@ -5660,7 +5717,7 @@
               </a:spcAft>
             </a:pPr>
             <a:r>
-              <a:rPr sz="1100" b="0" i="0">
+              <a:rPr sz="1000" b="0" i="0">
                 <a:solidFill>
                   <a:srgbClr val="6B7280"/>
                 </a:solidFill>
